--- a/finLM_overview.pptx
+++ b/finLM_overview.pptx
@@ -2372,7 +2372,7 @@
                 <a:ea typeface="Calibri" pitchFamily="34" charset="-122"/>
                 <a:cs typeface="Calibri" pitchFamily="34" charset="-120"/>
               </a:rPr>
-              <a:t>Hasil  ·  github.com/hasil7677/finLLM</a:t>
+              <a:t>Hasil  ·  github.com/hasil7677/finLM</a:t>
             </a:r>
             <a:endParaRPr lang="en-US" sz="1200" dirty="0"/>
           </a:p>
@@ -3780,7 +3780,7 @@
                 <a:ea typeface="Cambria" pitchFamily="34" charset="-122"/>
                 <a:cs typeface="Cambria" pitchFamily="34" charset="-120"/>
               </a:rPr>
-              <a:t>finLM  ·  Hasil  ·  github.com/hasil7677/finLLM</a:t>
+              <a:t>finLM  ·  Hasil  ·  github.com/hasil7677/finLM</a:t>
             </a:r>
             <a:endParaRPr lang="en-US" sz="1500" dirty="0"/>
           </a:p>
